--- a/slides/module_3_mechatronics_case.pptx
+++ b/slides/module_3_mechatronics_case.pptx
@@ -983,7 +983,7 @@
           </a:p>
           <a:p xmlns:a="http://schemas.openxmlformats.org/drawingml/2006/main">
             <a:r>
-              <a:t>La figura se regenera desde data/actuator_signals.csv. Señale que position_true_m es validación, no sensor operativo.</a:t>
+              <a:t>La figura se regenera desde los tres CSV de data/. Señale que position_true_m es validación, no sensor operativo.</a:t>
             </a:r>
           </a:p>
         </p:txBody>
